--- a/01_Foundations/slides/1_3_logistic_regression.pptx
+++ b/01_Foundations/slides/1_3_logistic_regression.pptx
@@ -127,196 +127,225 @@
 </p:presentation>
 </file>
 
+<file path=ppt/revisionInfo.xml><?xml version="1.0" encoding="utf-8"?>
+<p1510:revInfo xmlns:a="http://schemas.openxmlformats.org/drawingml/2006/main" xmlns:r="http://schemas.openxmlformats.org/officeDocument/2006/relationships" xmlns:p1510="http://schemas.microsoft.com/office/powerpoint/2015/10/main">
+  <p1510:revLst>
+    <p1510:client id="{6B91C6AF-B7BA-4D2E-B55F-47920918F106}" v="44" dt="2026-10-20T08:35:52.731"/>
+  </p1510:revLst>
+</p1510:revInfo>
+</file>
+
 <file path=ppt/changesInfos/changesInfo1.xml><?xml version="1.0" encoding="utf-8"?>
 <pc:chgInfo xmlns:a="http://schemas.openxmlformats.org/drawingml/2006/main" xmlns:r="http://schemas.openxmlformats.org/officeDocument/2006/relationships" xmlns:ac="http://schemas.microsoft.com/office/drawing/2013/main/command" xmlns:pc="http://schemas.microsoft.com/office/powerpoint/2013/main/command">
   <pc:docChgLst>
     <pc:chgData name="Robbin Bouwmeester" userId="1dbfebabfc25a55a" providerId="LiveId" clId="{75D63595-F797-482E-A4A0-2F4889B74D4F}"/>
     <pc:docChg chg="undo custSel addSld delSld modSld sldOrd">
-      <pc:chgData name="Robbin Bouwmeester" userId="1dbfebabfc25a55a" providerId="LiveId" clId="{75D63595-F797-482E-A4A0-2F4889B74D4F}" dt="2026-10-15T14:07:16.455" v="158" actId="47"/>
+      <pc:chgData name="Robbin Bouwmeester" userId="1dbfebabfc25a55a" providerId="LiveId" clId="{75D63595-F797-482E-A4A0-2F4889B74D4F}" dt="2026-10-20T08:36:17.401" v="970" actId="20577"/>
       <pc:docMkLst>
         <pc:docMk/>
       </pc:docMkLst>
-      <pc:sldChg chg="delSp add del mod modShow">
-        <pc:chgData name="Robbin Bouwmeester" userId="1dbfebabfc25a55a" providerId="LiveId" clId="{75D63595-F797-482E-A4A0-2F4889B74D4F}" dt="2026-10-15T14:07:16.455" v="158" actId="47"/>
+      <pc:sldChg chg="modSp mod">
+        <pc:chgData name="Robbin Bouwmeester" userId="1dbfebabfc25a55a" providerId="LiveId" clId="{75D63595-F797-482E-A4A0-2F4889B74D4F}" dt="2026-10-19T14:26:30.864" v="495" actId="5793"/>
         <pc:sldMkLst>
           <pc:docMk/>
-          <pc:sldMk cId="2221189375" sldId="269"/>
+          <pc:sldMk cId="1744993155" sldId="257"/>
         </pc:sldMkLst>
+        <pc:spChg chg="mod">
+          <ac:chgData name="Robbin Bouwmeester" userId="1dbfebabfc25a55a" providerId="LiveId" clId="{75D63595-F797-482E-A4A0-2F4889B74D4F}" dt="2026-10-19T14:26:30.864" v="495" actId="5793"/>
+          <ac:spMkLst>
+            <pc:docMk/>
+            <pc:sldMk cId="1744993155" sldId="257"/>
+            <ac:spMk id="2" creationId="{2D8BA5C6-41D6-D395-1199-AEF8D7ECDB84}"/>
+          </ac:spMkLst>
+        </pc:spChg>
       </pc:sldChg>
-      <pc:sldChg chg="delSp add del mod modShow">
-        <pc:chgData name="Robbin Bouwmeester" userId="1dbfebabfc25a55a" providerId="LiveId" clId="{75D63595-F797-482E-A4A0-2F4889B74D4F}" dt="2026-10-15T14:07:16.455" v="158" actId="47"/>
+      <pc:sldChg chg="modSp mod">
+        <pc:chgData name="Robbin Bouwmeester" userId="1dbfebabfc25a55a" providerId="LiveId" clId="{75D63595-F797-482E-A4A0-2F4889B74D4F}" dt="2026-10-19T14:28:13.884" v="634" actId="255"/>
         <pc:sldMkLst>
           <pc:docMk/>
-          <pc:sldMk cId="853575327" sldId="275"/>
+          <pc:sldMk cId="4149993461" sldId="258"/>
         </pc:sldMkLst>
+        <pc:spChg chg="mod">
+          <ac:chgData name="Robbin Bouwmeester" userId="1dbfebabfc25a55a" providerId="LiveId" clId="{75D63595-F797-482E-A4A0-2F4889B74D4F}" dt="2026-10-19T14:28:13.884" v="634" actId="255"/>
+          <ac:spMkLst>
+            <pc:docMk/>
+            <pc:sldMk cId="4149993461" sldId="258"/>
+            <ac:spMk id="4" creationId="{C55DEC6F-96B3-11C5-5AFA-C97854741C46}"/>
+          </ac:spMkLst>
+        </pc:spChg>
       </pc:sldChg>
-      <pc:sldChg chg="delSp add del mod modShow">
-        <pc:chgData name="Robbin Bouwmeester" userId="1dbfebabfc25a55a" providerId="LiveId" clId="{75D63595-F797-482E-A4A0-2F4889B74D4F}" dt="2026-10-15T14:07:16.455" v="158" actId="47"/>
+      <pc:sldChg chg="modSp mod">
+        <pc:chgData name="Robbin Bouwmeester" userId="1dbfebabfc25a55a" providerId="LiveId" clId="{75D63595-F797-482E-A4A0-2F4889B74D4F}" dt="2026-10-19T14:28:10.104" v="633" actId="255"/>
         <pc:sldMkLst>
           <pc:docMk/>
-          <pc:sldMk cId="3972766607" sldId="276"/>
+          <pc:sldMk cId="3255972120" sldId="259"/>
         </pc:sldMkLst>
+        <pc:spChg chg="mod">
+          <ac:chgData name="Robbin Bouwmeester" userId="1dbfebabfc25a55a" providerId="LiveId" clId="{75D63595-F797-482E-A4A0-2F4889B74D4F}" dt="2026-10-19T14:28:10.104" v="633" actId="255"/>
+          <ac:spMkLst>
+            <pc:docMk/>
+            <pc:sldMk cId="3255972120" sldId="259"/>
+            <ac:spMk id="6" creationId="{EB6E3953-DDE9-0297-0C11-7B35F4A16D8A}"/>
+          </ac:spMkLst>
+        </pc:spChg>
       </pc:sldChg>
-      <pc:sldChg chg="delSp add del mod modShow">
-        <pc:chgData name="Robbin Bouwmeester" userId="1dbfebabfc25a55a" providerId="LiveId" clId="{75D63595-F797-482E-A4A0-2F4889B74D4F}" dt="2026-10-15T14:07:16.455" v="158" actId="47"/>
+      <pc:sldChg chg="modSp mod">
+        <pc:chgData name="Robbin Bouwmeester" userId="1dbfebabfc25a55a" providerId="LiveId" clId="{75D63595-F797-482E-A4A0-2F4889B74D4F}" dt="2026-10-20T08:33:09.914" v="758" actId="20577"/>
         <pc:sldMkLst>
           <pc:docMk/>
-          <pc:sldMk cId="4041310773" sldId="277"/>
+          <pc:sldMk cId="2866331159" sldId="260"/>
         </pc:sldMkLst>
+        <pc:spChg chg="mod">
+          <ac:chgData name="Robbin Bouwmeester" userId="1dbfebabfc25a55a" providerId="LiveId" clId="{75D63595-F797-482E-A4A0-2F4889B74D4F}" dt="2026-10-20T08:33:09.914" v="758" actId="20577"/>
+          <ac:spMkLst>
+            <pc:docMk/>
+            <pc:sldMk cId="2866331159" sldId="260"/>
+            <ac:spMk id="4" creationId="{AC1C5531-79CA-C2A9-F35E-CABE78DBE20D}"/>
+          </ac:spMkLst>
+        </pc:spChg>
       </pc:sldChg>
-      <pc:sldChg chg="delSp add del mod modShow">
-        <pc:chgData name="Robbin Bouwmeester" userId="1dbfebabfc25a55a" providerId="LiveId" clId="{75D63595-F797-482E-A4A0-2F4889B74D4F}" dt="2026-10-15T14:07:16.455" v="158" actId="47"/>
+      <pc:sldChg chg="modSp mod">
+        <pc:chgData name="Robbin Bouwmeester" userId="1dbfebabfc25a55a" providerId="LiveId" clId="{75D63595-F797-482E-A4A0-2F4889B74D4F}" dt="2026-10-20T08:36:17.401" v="970" actId="20577"/>
         <pc:sldMkLst>
           <pc:docMk/>
-          <pc:sldMk cId="3512607124" sldId="278"/>
+          <pc:sldMk cId="556409808" sldId="261"/>
         </pc:sldMkLst>
+        <pc:spChg chg="mod">
+          <ac:chgData name="Robbin Bouwmeester" userId="1dbfebabfc25a55a" providerId="LiveId" clId="{75D63595-F797-482E-A4A0-2F4889B74D4F}" dt="2026-10-20T08:36:17.401" v="970" actId="20577"/>
+          <ac:spMkLst>
+            <pc:docMk/>
+            <pc:sldMk cId="556409808" sldId="261"/>
+            <ac:spMk id="5" creationId="{7B5E8FCE-AA6D-3103-054A-84544432CEE5}"/>
+          </ac:spMkLst>
+        </pc:spChg>
       </pc:sldChg>
-      <pc:sldChg chg="delSp modSp add del mod modShow">
-        <pc:chgData name="Robbin Bouwmeester" userId="1dbfebabfc25a55a" providerId="LiveId" clId="{75D63595-F797-482E-A4A0-2F4889B74D4F}" dt="2026-10-15T14:07:16.455" v="158" actId="47"/>
+      <pc:sldChg chg="modSp mod">
+        <pc:chgData name="Robbin Bouwmeester" userId="1dbfebabfc25a55a" providerId="LiveId" clId="{75D63595-F797-482E-A4A0-2F4889B74D4F}" dt="2026-10-20T08:36:12.338" v="965" actId="20577"/>
         <pc:sldMkLst>
           <pc:docMk/>
-          <pc:sldMk cId="980939478" sldId="283"/>
+          <pc:sldMk cId="4282199305" sldId="262"/>
         </pc:sldMkLst>
+        <pc:spChg chg="mod">
+          <ac:chgData name="Robbin Bouwmeester" userId="1dbfebabfc25a55a" providerId="LiveId" clId="{75D63595-F797-482E-A4A0-2F4889B74D4F}" dt="2026-10-20T08:36:12.338" v="965" actId="20577"/>
+          <ac:spMkLst>
+            <pc:docMk/>
+            <pc:sldMk cId="4282199305" sldId="262"/>
+            <ac:spMk id="5" creationId="{FC452886-C753-5E96-D8D4-6CB3236F3895}"/>
+          </ac:spMkLst>
+        </pc:spChg>
       </pc:sldChg>
-      <pc:sldChg chg="delSp modSp add del mod modShow">
-        <pc:chgData name="Robbin Bouwmeester" userId="1dbfebabfc25a55a" providerId="LiveId" clId="{75D63595-F797-482E-A4A0-2F4889B74D4F}" dt="2026-10-15T14:07:16.455" v="158" actId="47"/>
+      <pc:sldChg chg="addSp delSp modSp mod">
+        <pc:chgData name="Robbin Bouwmeester" userId="1dbfebabfc25a55a" providerId="LiveId" clId="{75D63595-F797-482E-A4A0-2F4889B74D4F}" dt="2026-10-20T08:36:04.237" v="955" actId="20577"/>
         <pc:sldMkLst>
           <pc:docMk/>
-          <pc:sldMk cId="4087039867" sldId="284"/>
+          <pc:sldMk cId="2749873298" sldId="263"/>
         </pc:sldMkLst>
+        <pc:spChg chg="add del mod">
+          <ac:chgData name="Robbin Bouwmeester" userId="1dbfebabfc25a55a" providerId="LiveId" clId="{75D63595-F797-482E-A4A0-2F4889B74D4F}" dt="2026-10-20T08:36:04.237" v="955" actId="20577"/>
+          <ac:spMkLst>
+            <pc:docMk/>
+            <pc:sldMk cId="2749873298" sldId="263"/>
+            <ac:spMk id="2" creationId="{2A2A9286-3E2C-C846-B564-2AAAE7FF5A2B}"/>
+          </ac:spMkLst>
+        </pc:spChg>
       </pc:sldChg>
-      <pc:sldChg chg="delSp add del mod modShow">
-        <pc:chgData name="Robbin Bouwmeester" userId="1dbfebabfc25a55a" providerId="LiveId" clId="{75D63595-F797-482E-A4A0-2F4889B74D4F}" dt="2026-10-15T14:07:16.455" v="158" actId="47"/>
+      <pc:sldChg chg="modSp mod">
+        <pc:chgData name="Robbin Bouwmeester" userId="1dbfebabfc25a55a" providerId="LiveId" clId="{75D63595-F797-482E-A4A0-2F4889B74D4F}" dt="2026-10-19T14:25:36.553" v="328" actId="255"/>
         <pc:sldMkLst>
           <pc:docMk/>
-          <pc:sldMk cId="4250473701" sldId="502"/>
+          <pc:sldMk cId="1836664154" sldId="264"/>
         </pc:sldMkLst>
+        <pc:spChg chg="mod">
+          <ac:chgData name="Robbin Bouwmeester" userId="1dbfebabfc25a55a" providerId="LiveId" clId="{75D63595-F797-482E-A4A0-2F4889B74D4F}" dt="2026-10-19T14:25:36.553" v="328" actId="255"/>
+          <ac:spMkLst>
+            <pc:docMk/>
+            <pc:sldMk cId="1836664154" sldId="264"/>
+            <ac:spMk id="2" creationId="{E34ED3F4-A435-A628-C907-017EB704F005}"/>
+          </ac:spMkLst>
+        </pc:spChg>
+        <pc:picChg chg="mod">
+          <ac:chgData name="Robbin Bouwmeester" userId="1dbfebabfc25a55a" providerId="LiveId" clId="{75D63595-F797-482E-A4A0-2F4889B74D4F}" dt="2026-10-19T14:24:32.193" v="193" actId="1035"/>
+          <ac:picMkLst>
+            <pc:docMk/>
+            <pc:sldMk cId="1836664154" sldId="264"/>
+            <ac:picMk id="1026" creationId="{3A596A6A-16A8-EEBD-29AE-31D521883EC6}"/>
+          </ac:picMkLst>
+        </pc:picChg>
       </pc:sldChg>
-      <pc:sldChg chg="delSp add del mod modShow">
-        <pc:chgData name="Robbin Bouwmeester" userId="1dbfebabfc25a55a" providerId="LiveId" clId="{75D63595-F797-482E-A4A0-2F4889B74D4F}" dt="2026-10-15T14:07:16.455" v="158" actId="47"/>
+      <pc:sldChg chg="modSp mod">
+        <pc:chgData name="Robbin Bouwmeester" userId="1dbfebabfc25a55a" providerId="LiveId" clId="{75D63595-F797-482E-A4A0-2F4889B74D4F}" dt="2026-10-20T08:36:09.053" v="960" actId="20577"/>
         <pc:sldMkLst>
           <pc:docMk/>
-          <pc:sldMk cId="2305688116" sldId="503"/>
+          <pc:sldMk cId="3723209745" sldId="501"/>
         </pc:sldMkLst>
+        <pc:spChg chg="mod">
+          <ac:chgData name="Robbin Bouwmeester" userId="1dbfebabfc25a55a" providerId="LiveId" clId="{75D63595-F797-482E-A4A0-2F4889B74D4F}" dt="2026-10-20T08:36:09.053" v="960" actId="20577"/>
+          <ac:spMkLst>
+            <pc:docMk/>
+            <pc:sldMk cId="3723209745" sldId="501"/>
+            <ac:spMk id="4" creationId="{AC1C5531-79CA-C2A9-F35E-CABE78DBE20D}"/>
+          </ac:spMkLst>
+        </pc:spChg>
       </pc:sldChg>
-      <pc:sldChg chg="delSp add del mod modShow">
-        <pc:chgData name="Robbin Bouwmeester" userId="1dbfebabfc25a55a" providerId="LiveId" clId="{75D63595-F797-482E-A4A0-2F4889B74D4F}" dt="2026-10-15T14:07:16.455" v="158" actId="47"/>
+      <pc:sldChg chg="modSp mod">
+        <pc:chgData name="Robbin Bouwmeester" userId="1dbfebabfc25a55a" providerId="LiveId" clId="{75D63595-F797-482E-A4A0-2F4889B74D4F}" dt="2026-10-19T14:28:04.007" v="632" actId="255"/>
         <pc:sldMkLst>
           <pc:docMk/>
-          <pc:sldMk cId="3800246220" sldId="504"/>
+          <pc:sldMk cId="214929670" sldId="589"/>
         </pc:sldMkLst>
+        <pc:spChg chg="mod">
+          <ac:chgData name="Robbin Bouwmeester" userId="1dbfebabfc25a55a" providerId="LiveId" clId="{75D63595-F797-482E-A4A0-2F4889B74D4F}" dt="2026-10-19T14:28:04.007" v="632" actId="255"/>
+          <ac:spMkLst>
+            <pc:docMk/>
+            <pc:sldMk cId="214929670" sldId="589"/>
+            <ac:spMk id="6" creationId="{5EBBD893-8D3D-56F6-246E-6CD7D5E15633}"/>
+          </ac:spMkLst>
+        </pc:spChg>
       </pc:sldChg>
-      <pc:sldChg chg="delSp add del mod modShow">
-        <pc:chgData name="Robbin Bouwmeester" userId="1dbfebabfc25a55a" providerId="LiveId" clId="{75D63595-F797-482E-A4A0-2F4889B74D4F}" dt="2026-10-15T14:07:16.455" v="158" actId="47"/>
+      <pc:sldChg chg="modSp">
+        <pc:chgData name="Robbin Bouwmeester" userId="1dbfebabfc25a55a" providerId="LiveId" clId="{75D63595-F797-482E-A4A0-2F4889B74D4F}" dt="2026-10-20T08:31:05.153" v="635"/>
         <pc:sldMkLst>
           <pc:docMk/>
-          <pc:sldMk cId="3629786000" sldId="505"/>
+          <pc:sldMk cId="2116186294" sldId="590"/>
         </pc:sldMkLst>
+        <pc:spChg chg="mod">
+          <ac:chgData name="Robbin Bouwmeester" userId="1dbfebabfc25a55a" providerId="LiveId" clId="{75D63595-F797-482E-A4A0-2F4889B74D4F}" dt="2026-10-20T08:31:05.153" v="635"/>
+          <ac:spMkLst>
+            <pc:docMk/>
+            <pc:sldMk cId="2116186294" sldId="590"/>
+            <ac:spMk id="6" creationId="{76DA1E1B-14E0-8240-7F10-CC1401913BED}"/>
+          </ac:spMkLst>
+        </pc:spChg>
       </pc:sldChg>
-      <pc:sldChg chg="delSp add del mod modShow">
-        <pc:chgData name="Robbin Bouwmeester" userId="1dbfebabfc25a55a" providerId="LiveId" clId="{75D63595-F797-482E-A4A0-2F4889B74D4F}" dt="2026-10-15T14:07:16.455" v="158" actId="47"/>
+      <pc:sldChg chg="modSp">
+        <pc:chgData name="Robbin Bouwmeester" userId="1dbfebabfc25a55a" providerId="LiveId" clId="{75D63595-F797-482E-A4A0-2F4889B74D4F}" dt="2026-10-20T08:33:34.581" v="759"/>
         <pc:sldMkLst>
           <pc:docMk/>
-          <pc:sldMk cId="2892356855" sldId="506"/>
+          <pc:sldMk cId="20081744" sldId="591"/>
         </pc:sldMkLst>
+        <pc:spChg chg="mod">
+          <ac:chgData name="Robbin Bouwmeester" userId="1dbfebabfc25a55a" providerId="LiveId" clId="{75D63595-F797-482E-A4A0-2F4889B74D4F}" dt="2026-10-20T08:33:34.581" v="759"/>
+          <ac:spMkLst>
+            <pc:docMk/>
+            <pc:sldMk cId="20081744" sldId="591"/>
+            <ac:spMk id="4" creationId="{D62E94E3-146F-3E01-6677-07A939521EC1}"/>
+          </ac:spMkLst>
+        </pc:spChg>
       </pc:sldChg>
-      <pc:sldChg chg="delSp add del mod modShow">
-        <pc:chgData name="Robbin Bouwmeester" userId="1dbfebabfc25a55a" providerId="LiveId" clId="{75D63595-F797-482E-A4A0-2F4889B74D4F}" dt="2026-10-15T14:07:16.455" v="158" actId="47"/>
+      <pc:sldChg chg="modSp">
+        <pc:chgData name="Robbin Bouwmeester" userId="1dbfebabfc25a55a" providerId="LiveId" clId="{75D63595-F797-482E-A4A0-2F4889B74D4F}" dt="2026-10-20T08:33:37.211" v="760"/>
         <pc:sldMkLst>
           <pc:docMk/>
-          <pc:sldMk cId="3159280956" sldId="507"/>
+          <pc:sldMk cId="2720685458" sldId="592"/>
         </pc:sldMkLst>
-      </pc:sldChg>
-      <pc:sldChg chg="delSp add del mod modShow">
-        <pc:chgData name="Robbin Bouwmeester" userId="1dbfebabfc25a55a" providerId="LiveId" clId="{75D63595-F797-482E-A4A0-2F4889B74D4F}" dt="2026-10-15T14:07:16.455" v="158" actId="47"/>
-        <pc:sldMkLst>
-          <pc:docMk/>
-          <pc:sldMk cId="847836067" sldId="508"/>
-        </pc:sldMkLst>
-      </pc:sldChg>
-      <pc:sldChg chg="delSp add del mod modShow">
-        <pc:chgData name="Robbin Bouwmeester" userId="1dbfebabfc25a55a" providerId="LiveId" clId="{75D63595-F797-482E-A4A0-2F4889B74D4F}" dt="2026-10-15T14:07:16.455" v="158" actId="47"/>
-        <pc:sldMkLst>
-          <pc:docMk/>
-          <pc:sldMk cId="2714935546" sldId="509"/>
-        </pc:sldMkLst>
-      </pc:sldChg>
-      <pc:sldChg chg="delSp add del mod modShow">
-        <pc:chgData name="Robbin Bouwmeester" userId="1dbfebabfc25a55a" providerId="LiveId" clId="{75D63595-F797-482E-A4A0-2F4889B74D4F}" dt="2026-10-15T14:07:16.455" v="158" actId="47"/>
-        <pc:sldMkLst>
-          <pc:docMk/>
-          <pc:sldMk cId="387485141" sldId="510"/>
-        </pc:sldMkLst>
-      </pc:sldChg>
-      <pc:sldChg chg="delSp add del mod modShow">
-        <pc:chgData name="Robbin Bouwmeester" userId="1dbfebabfc25a55a" providerId="LiveId" clId="{75D63595-F797-482E-A4A0-2F4889B74D4F}" dt="2026-10-15T14:07:16.455" v="158" actId="47"/>
-        <pc:sldMkLst>
-          <pc:docMk/>
-          <pc:sldMk cId="145594347" sldId="511"/>
-        </pc:sldMkLst>
-      </pc:sldChg>
-      <pc:sldChg chg="delSp add del mod modShow">
-        <pc:chgData name="Robbin Bouwmeester" userId="1dbfebabfc25a55a" providerId="LiveId" clId="{75D63595-F797-482E-A4A0-2F4889B74D4F}" dt="2026-10-15T14:07:16.455" v="158" actId="47"/>
-        <pc:sldMkLst>
-          <pc:docMk/>
-          <pc:sldMk cId="4112647850" sldId="512"/>
-        </pc:sldMkLst>
-      </pc:sldChg>
-      <pc:sldChg chg="delSp add del mod modShow">
-        <pc:chgData name="Robbin Bouwmeester" userId="1dbfebabfc25a55a" providerId="LiveId" clId="{75D63595-F797-482E-A4A0-2F4889B74D4F}" dt="2026-10-15T14:07:16.455" v="158" actId="47"/>
-        <pc:sldMkLst>
-          <pc:docMk/>
-          <pc:sldMk cId="806297350" sldId="513"/>
-        </pc:sldMkLst>
-      </pc:sldChg>
-      <pc:sldChg chg="delSp add del mod modShow">
-        <pc:chgData name="Robbin Bouwmeester" userId="1dbfebabfc25a55a" providerId="LiveId" clId="{75D63595-F797-482E-A4A0-2F4889B74D4F}" dt="2026-10-15T14:07:16.455" v="158" actId="47"/>
-        <pc:sldMkLst>
-          <pc:docMk/>
-          <pc:sldMk cId="1772292703" sldId="514"/>
-        </pc:sldMkLst>
-      </pc:sldChg>
-      <pc:sldChg chg="delSp add del mod modShow">
-        <pc:chgData name="Robbin Bouwmeester" userId="1dbfebabfc25a55a" providerId="LiveId" clId="{75D63595-F797-482E-A4A0-2F4889B74D4F}" dt="2026-10-15T14:07:16.455" v="158" actId="47"/>
-        <pc:sldMkLst>
-          <pc:docMk/>
-          <pc:sldMk cId="2603407554" sldId="515"/>
-        </pc:sldMkLst>
-      </pc:sldChg>
-      <pc:sldChg chg="delSp add del mod modShow">
-        <pc:chgData name="Robbin Bouwmeester" userId="1dbfebabfc25a55a" providerId="LiveId" clId="{75D63595-F797-482E-A4A0-2F4889B74D4F}" dt="2026-10-15T14:07:16.455" v="158" actId="47"/>
-        <pc:sldMkLst>
-          <pc:docMk/>
-          <pc:sldMk cId="3391514582" sldId="579"/>
-        </pc:sldMkLst>
-      </pc:sldChg>
-      <pc:sldChg chg="delSp add del mod modShow">
-        <pc:chgData name="Robbin Bouwmeester" userId="1dbfebabfc25a55a" providerId="LiveId" clId="{75D63595-F797-482E-A4A0-2F4889B74D4F}" dt="2026-10-15T14:07:16.455" v="158" actId="47"/>
-        <pc:sldMkLst>
-          <pc:docMk/>
-          <pc:sldMk cId="1687488206" sldId="587"/>
-        </pc:sldMkLst>
-      </pc:sldChg>
-      <pc:sldChg chg="delSp add del mod modShow">
-        <pc:chgData name="Robbin Bouwmeester" userId="1dbfebabfc25a55a" providerId="LiveId" clId="{75D63595-F797-482E-A4A0-2F4889B74D4F}" dt="2026-10-15T14:07:16.455" v="158" actId="47"/>
-        <pc:sldMkLst>
-          <pc:docMk/>
-          <pc:sldMk cId="2262474848" sldId="588"/>
-        </pc:sldMkLst>
-      </pc:sldChg>
-      <pc:sldChg chg="addSp modSp new del mod modShow">
-        <pc:chgData name="Robbin Bouwmeester" userId="1dbfebabfc25a55a" providerId="LiveId" clId="{75D63595-F797-482E-A4A0-2F4889B74D4F}" dt="2026-10-15T14:07:16.455" v="158" actId="47"/>
-        <pc:sldMkLst>
-          <pc:docMk/>
-          <pc:sldMk cId="3585840279" sldId="594"/>
-        </pc:sldMkLst>
-      </pc:sldChg>
-      <pc:sldChg chg="add del mod modShow">
-        <pc:chgData name="Robbin Bouwmeester" userId="1dbfebabfc25a55a" providerId="LiveId" clId="{75D63595-F797-482E-A4A0-2F4889B74D4F}" dt="2026-10-15T14:07:16.455" v="158" actId="47"/>
-        <pc:sldMkLst>
-          <pc:docMk/>
-          <pc:sldMk cId="1071226085" sldId="595"/>
-        </pc:sldMkLst>
+        <pc:spChg chg="mod">
+          <ac:chgData name="Robbin Bouwmeester" userId="1dbfebabfc25a55a" providerId="LiveId" clId="{75D63595-F797-482E-A4A0-2F4889B74D4F}" dt="2026-10-20T08:33:37.211" v="760"/>
+          <ac:spMkLst>
+            <pc:docMk/>
+            <pc:sldMk cId="2720685458" sldId="592"/>
+            <ac:spMk id="4" creationId="{10808BA1-4BBB-3B38-4584-91EE285247EC}"/>
+          </ac:spMkLst>
+        </pc:spChg>
       </pc:sldChg>
     </pc:docChg>
   </pc:docChgLst>
@@ -405,7 +434,7 @@
           <a:p>
             <a:fld id="{5E9E4307-97E3-48E4-B22B-3E65CE2A671E}" type="datetimeFigureOut">
               <a:rPr lang="en-GB" smtClean="0"/>
-              <a:t>15/10/2026</a:t>
+              <a:t>20/10/2026</a:t>
             </a:fld>
             <a:endParaRPr lang="en-GB"/>
           </a:p>
@@ -1189,7 +1218,7 @@
           <a:p>
             <a:fld id="{3D4C3592-CF2E-41CC-9324-DF0416BA06CC}" type="datetimeFigureOut">
               <a:rPr lang="en-GB" smtClean="0"/>
-              <a:t>15/10/2026</a:t>
+              <a:t>20/10/2026</a:t>
             </a:fld>
             <a:endParaRPr lang="en-GB"/>
           </a:p>
@@ -1359,7 +1388,7 @@
           <a:p>
             <a:fld id="{3D4C3592-CF2E-41CC-9324-DF0416BA06CC}" type="datetimeFigureOut">
               <a:rPr lang="en-GB" smtClean="0"/>
-              <a:t>15/10/2026</a:t>
+              <a:t>20/10/2026</a:t>
             </a:fld>
             <a:endParaRPr lang="en-GB"/>
           </a:p>
@@ -1539,7 +1568,7 @@
           <a:p>
             <a:fld id="{3D4C3592-CF2E-41CC-9324-DF0416BA06CC}" type="datetimeFigureOut">
               <a:rPr lang="en-GB" smtClean="0"/>
-              <a:t>15/10/2026</a:t>
+              <a:t>20/10/2026</a:t>
             </a:fld>
             <a:endParaRPr lang="en-GB"/>
           </a:p>
@@ -1709,7 +1738,7 @@
           <a:p>
             <a:fld id="{3D4C3592-CF2E-41CC-9324-DF0416BA06CC}" type="datetimeFigureOut">
               <a:rPr lang="en-GB" smtClean="0"/>
-              <a:t>15/10/2026</a:t>
+              <a:t>20/10/2026</a:t>
             </a:fld>
             <a:endParaRPr lang="en-GB"/>
           </a:p>
@@ -1955,7 +1984,7 @@
           <a:p>
             <a:fld id="{3D4C3592-CF2E-41CC-9324-DF0416BA06CC}" type="datetimeFigureOut">
               <a:rPr lang="en-GB" smtClean="0"/>
-              <a:t>15/10/2026</a:t>
+              <a:t>20/10/2026</a:t>
             </a:fld>
             <a:endParaRPr lang="en-GB"/>
           </a:p>
@@ -2187,7 +2216,7 @@
           <a:p>
             <a:fld id="{3D4C3592-CF2E-41CC-9324-DF0416BA06CC}" type="datetimeFigureOut">
               <a:rPr lang="en-GB" smtClean="0"/>
-              <a:t>15/10/2026</a:t>
+              <a:t>20/10/2026</a:t>
             </a:fld>
             <a:endParaRPr lang="en-GB"/>
           </a:p>
@@ -2554,7 +2583,7 @@
           <a:p>
             <a:fld id="{3D4C3592-CF2E-41CC-9324-DF0416BA06CC}" type="datetimeFigureOut">
               <a:rPr lang="en-GB" smtClean="0"/>
-              <a:t>15/10/2026</a:t>
+              <a:t>20/10/2026</a:t>
             </a:fld>
             <a:endParaRPr lang="en-GB"/>
           </a:p>
@@ -2672,7 +2701,7 @@
           <a:p>
             <a:fld id="{3D4C3592-CF2E-41CC-9324-DF0416BA06CC}" type="datetimeFigureOut">
               <a:rPr lang="en-GB" smtClean="0"/>
-              <a:t>15/10/2026</a:t>
+              <a:t>20/10/2026</a:t>
             </a:fld>
             <a:endParaRPr lang="en-GB"/>
           </a:p>
@@ -2767,7 +2796,7 @@
           <a:p>
             <a:fld id="{3D4C3592-CF2E-41CC-9324-DF0416BA06CC}" type="datetimeFigureOut">
               <a:rPr lang="en-GB" smtClean="0"/>
-              <a:t>15/10/2026</a:t>
+              <a:t>20/10/2026</a:t>
             </a:fld>
             <a:endParaRPr lang="en-GB"/>
           </a:p>
@@ -3044,7 +3073,7 @@
           <a:p>
             <a:fld id="{3D4C3592-CF2E-41CC-9324-DF0416BA06CC}" type="datetimeFigureOut">
               <a:rPr lang="en-GB" smtClean="0"/>
-              <a:t>15/10/2026</a:t>
+              <a:t>20/10/2026</a:t>
             </a:fld>
             <a:endParaRPr lang="en-GB"/>
           </a:p>
@@ -3297,7 +3326,7 @@
           <a:p>
             <a:fld id="{3D4C3592-CF2E-41CC-9324-DF0416BA06CC}" type="datetimeFigureOut">
               <a:rPr lang="en-GB" smtClean="0"/>
-              <a:t>15/10/2026</a:t>
+              <a:t>20/10/2026</a:t>
             </a:fld>
             <a:endParaRPr lang="en-GB"/>
           </a:p>
@@ -3510,7 +3539,7 @@
           <a:p>
             <a:fld id="{3D4C3592-CF2E-41CC-9324-DF0416BA06CC}" type="datetimeFigureOut">
               <a:rPr lang="en-GB" smtClean="0"/>
-              <a:t>15/10/2026</a:t>
+              <a:t>20/10/2026</a:t>
             </a:fld>
             <a:endParaRPr lang="en-GB"/>
           </a:p>
@@ -3936,7 +3965,7 @@
         <p:spPr>
           <a:xfrm>
             <a:off x="241301" y="129804"/>
-            <a:ext cx="11747500" cy="523220"/>
+            <a:ext cx="11747500" cy="1015663"/>
           </a:xfrm>
           <a:prstGeom prst="rect">
             <a:avLst/>
@@ -3950,15 +3979,13 @@
           <a:lstStyle/>
           <a:p>
             <a:r>
-              <a:rPr lang="en-US" sz="2800" dirty="0">
-                <a:latin typeface="+mj-lt"/>
-                <a:ea typeface="Lato" panose="020B0604020202020204" pitchFamily="34" charset="0"/>
-                <a:cs typeface="Helvetica" panose="020B0604020202020204" pitchFamily="34" charset="0"/>
+              <a:rPr lang="en-US" sz="3000" b="1" dirty="0">
+                <a:latin typeface="Corbel" panose="020B0503020204020204" pitchFamily="34" charset="0"/>
               </a:rPr>
-              <a:t>Classification – breast cancer data</a:t>
-            </a:r>
-            <a:endParaRPr lang="en-GB" sz="2800" dirty="0">
-              <a:latin typeface="+mj-lt"/>
+              <a:t>Classification of breast cancer samples (malignant or benign) based on features from an MRI (radius)</a:t>
+            </a:r>
+            <a:endParaRPr lang="en-GB" sz="3000" b="1" dirty="0">
+              <a:latin typeface="Corbel" panose="020B0503020204020204" pitchFamily="34" charset="0"/>
               <a:ea typeface="Lato" panose="020B0604020202020204" pitchFamily="34" charset="0"/>
               <a:cs typeface="Helvetica" panose="020B0604020202020204" pitchFamily="34" charset="0"/>
             </a:endParaRPr>
@@ -3994,7 +4021,7 @@
         </p:blipFill>
         <p:spPr bwMode="auto">
           <a:xfrm>
-            <a:off x="3427998" y="741947"/>
+            <a:off x="3427998" y="1127200"/>
             <a:ext cx="5374106" cy="5374106"/>
           </a:xfrm>
           <a:prstGeom prst="rect">
@@ -4095,15 +4122,19 @@
           <a:lstStyle/>
           <a:p>
             <a:r>
-              <a:rPr lang="en-US" sz="2800" dirty="0">
-                <a:latin typeface="+mj-lt"/>
-                <a:ea typeface="Lato" panose="020B0604020202020204" pitchFamily="34" charset="0"/>
-                <a:cs typeface="Helvetica" panose="020B0604020202020204" pitchFamily="34" charset="0"/>
+              <a:rPr lang="en-US" sz="2800" b="1">
+                <a:latin typeface="Corbel" panose="020B0503020204020204" pitchFamily="34" charset="0"/>
               </a:rPr>
-              <a:t>logistic regression: cost (loss function)</a:t>
-            </a:r>
-            <a:endParaRPr lang="en-GB" sz="2800" dirty="0">
-              <a:latin typeface="+mj-lt"/>
+              <a:t>Cost function </a:t>
+            </a:r>
+            <a:r>
+              <a:rPr lang="en-US" sz="2800" b="1" dirty="0">
+                <a:latin typeface="Corbel" panose="020B0503020204020204" pitchFamily="34" charset="0"/>
+              </a:rPr>
+              <a:t>penalizes absolute certainty about the class very hard</a:t>
+            </a:r>
+            <a:endParaRPr lang="en-GB" sz="2800" b="1" dirty="0">
+              <a:latin typeface="Corbel" panose="020B0503020204020204" pitchFamily="34" charset="0"/>
               <a:ea typeface="Lato" panose="020B0604020202020204" pitchFamily="34" charset="0"/>
               <a:cs typeface="Helvetica" panose="020B0604020202020204" pitchFamily="34" charset="0"/>
             </a:endParaRPr>
@@ -4229,15 +4260,13 @@
           <a:lstStyle/>
           <a:p>
             <a:r>
-              <a:rPr lang="en-US" sz="2800" dirty="0">
-                <a:latin typeface="+mj-lt"/>
-                <a:ea typeface="Lato" panose="020B0604020202020204" pitchFamily="34" charset="0"/>
-                <a:cs typeface="Helvetica" panose="020B0604020202020204" pitchFamily="34" charset="0"/>
+              <a:rPr lang="en-US" sz="2800" b="1" dirty="0">
+                <a:latin typeface="Corbel" panose="020B0503020204020204" pitchFamily="34" charset="0"/>
               </a:rPr>
-              <a:t>logistic regression: cost (loss function)</a:t>
-            </a:r>
-            <a:endParaRPr lang="en-GB" sz="2800" dirty="0">
-              <a:latin typeface="+mj-lt"/>
+              <a:t>Cost function penalizes absolute certainty about the class very hard</a:t>
+            </a:r>
+            <a:endParaRPr lang="en-GB" sz="2800" b="1" dirty="0">
+              <a:latin typeface="Corbel" panose="020B0503020204020204" pitchFamily="34" charset="0"/>
               <a:ea typeface="Lato" panose="020B0604020202020204" pitchFamily="34" charset="0"/>
               <a:cs typeface="Helvetica" panose="020B0604020202020204" pitchFamily="34" charset="0"/>
             </a:endParaRPr>
@@ -4339,13 +4368,13 @@
           <a:lstStyle/>
           <a:p>
             <a:r>
-              <a:rPr lang="en-US" sz="2800" dirty="0">
-                <a:ea typeface="Lato" panose="020B0604020202020204" pitchFamily="34" charset="0"/>
-                <a:cs typeface="Helvetica" panose="020B0604020202020204" pitchFamily="34" charset="0"/>
+              <a:rPr lang="en-US" sz="2800" b="1" dirty="0">
+                <a:latin typeface="Corbel" panose="020B0503020204020204" pitchFamily="34" charset="0"/>
               </a:rPr>
-              <a:t>Logistic regression: cost (loss function)</a:t>
-            </a:r>
-            <a:endParaRPr lang="en-GB" sz="2800" dirty="0">
+              <a:t>Cost function penalizes absolute certainty about the class very hard</a:t>
+            </a:r>
+            <a:endParaRPr lang="en-GB" sz="2800" b="1" dirty="0">
+              <a:latin typeface="Corbel" panose="020B0503020204020204" pitchFamily="34" charset="0"/>
               <a:ea typeface="Lato" panose="020B0604020202020204" pitchFamily="34" charset="0"/>
               <a:cs typeface="Helvetica" panose="020B0604020202020204" pitchFamily="34" charset="0"/>
             </a:endParaRPr>
@@ -4605,15 +4634,13 @@
           <a:lstStyle/>
           <a:p>
             <a:r>
-              <a:rPr lang="en-US" sz="2800" dirty="0">
-                <a:latin typeface="+mj-lt"/>
-                <a:ea typeface="Lato" panose="020B0604020202020204" pitchFamily="34" charset="0"/>
-                <a:cs typeface="Helvetica" panose="020B0604020202020204" pitchFamily="34" charset="0"/>
+              <a:rPr lang="en-US" sz="2800" b="1" dirty="0">
+                <a:latin typeface="Corbel" panose="020B0503020204020204" pitchFamily="34" charset="0"/>
               </a:rPr>
-              <a:t>logistic regression</a:t>
-            </a:r>
-            <a:endParaRPr lang="en-GB" sz="2800" dirty="0">
-              <a:latin typeface="+mj-lt"/>
+              <a:t>Formalized version of logistic regression</a:t>
+            </a:r>
+            <a:endParaRPr lang="en-GB" sz="2800" b="1" dirty="0">
+              <a:latin typeface="Corbel" panose="020B0503020204020204" pitchFamily="34" charset="0"/>
               <a:ea typeface="Lato" panose="020B0604020202020204" pitchFamily="34" charset="0"/>
               <a:cs typeface="Helvetica" panose="020B0604020202020204" pitchFamily="34" charset="0"/>
             </a:endParaRPr>
@@ -4931,7 +4958,7 @@
         <p:spPr>
           <a:xfrm>
             <a:off x="241301" y="129804"/>
-            <a:ext cx="11747500" cy="523220"/>
+            <a:ext cx="11747500" cy="1015663"/>
           </a:xfrm>
           <a:prstGeom prst="rect">
             <a:avLst/>
@@ -4945,15 +4972,13 @@
           <a:lstStyle/>
           <a:p>
             <a:r>
-              <a:rPr lang="en-US" sz="2800" dirty="0">
-                <a:latin typeface="+mj-lt"/>
-                <a:ea typeface="Lato" panose="020B0604020202020204" pitchFamily="34" charset="0"/>
-                <a:cs typeface="Helvetica" panose="020B0604020202020204" pitchFamily="34" charset="0"/>
+              <a:rPr lang="en-US" sz="3000" b="1" dirty="0">
+                <a:latin typeface="Corbel" panose="020B0503020204020204" pitchFamily="34" charset="0"/>
               </a:rPr>
-              <a:t>classification</a:t>
-            </a:r>
-            <a:endParaRPr lang="en-GB" sz="2800" dirty="0">
-              <a:latin typeface="+mj-lt"/>
+              <a:t>Classification can be represented as linear regression; and surprisingly it does work. Not very well though…</a:t>
+            </a:r>
+            <a:endParaRPr lang="en-GB" sz="3000" b="1" dirty="0">
+              <a:latin typeface="Corbel" panose="020B0503020204020204" pitchFamily="34" charset="0"/>
               <a:ea typeface="Lato" panose="020B0604020202020204" pitchFamily="34" charset="0"/>
               <a:cs typeface="Helvetica" panose="020B0604020202020204" pitchFamily="34" charset="0"/>
             </a:endParaRPr>
@@ -5271,7 +5296,7 @@
         <p:spPr>
           <a:xfrm>
             <a:off x="241301" y="129804"/>
-            <a:ext cx="11747500" cy="523220"/>
+            <a:ext cx="11747500" cy="1015663"/>
           </a:xfrm>
           <a:prstGeom prst="rect">
             <a:avLst/>
@@ -5285,15 +5310,13 @@
           <a:lstStyle/>
           <a:p>
             <a:r>
-              <a:rPr lang="en-US" sz="2800" dirty="0">
-                <a:latin typeface="+mj-lt"/>
-                <a:ea typeface="Lato" panose="020B0604020202020204" pitchFamily="34" charset="0"/>
-                <a:cs typeface="Helvetica" panose="020B0604020202020204" pitchFamily="34" charset="0"/>
+              <a:rPr lang="en-US" sz="3000" b="1" dirty="0">
+                <a:latin typeface="Corbel" panose="020B0503020204020204" pitchFamily="34" charset="0"/>
               </a:rPr>
-              <a:t>logistic regression</a:t>
-            </a:r>
-            <a:endParaRPr lang="en-GB" sz="2800" dirty="0">
-              <a:latin typeface="+mj-lt"/>
+              <a:t>Logistic regression is a much better fit; it has two extremes that are asymptotic to zero and one</a:t>
+            </a:r>
+            <a:endParaRPr lang="en-GB" sz="3000" b="1" dirty="0">
+              <a:latin typeface="Corbel" panose="020B0503020204020204" pitchFamily="34" charset="0"/>
               <a:ea typeface="Lato" panose="020B0604020202020204" pitchFamily="34" charset="0"/>
               <a:cs typeface="Helvetica" panose="020B0604020202020204" pitchFamily="34" charset="0"/>
             </a:endParaRPr>
@@ -5441,7 +5464,7 @@
         <p:spPr>
           <a:xfrm>
             <a:off x="241301" y="129804"/>
-            <a:ext cx="11747500" cy="523220"/>
+            <a:ext cx="11747500" cy="1015663"/>
           </a:xfrm>
           <a:prstGeom prst="rect">
             <a:avLst/>
@@ -5455,15 +5478,13 @@
           <a:lstStyle/>
           <a:p>
             <a:r>
-              <a:rPr lang="en-US" sz="2800" dirty="0">
-                <a:latin typeface="+mj-lt"/>
-                <a:ea typeface="Lato" panose="020B0604020202020204" pitchFamily="34" charset="0"/>
-                <a:cs typeface="Helvetica" panose="020B0604020202020204" pitchFamily="34" charset="0"/>
+              <a:rPr lang="en-US" sz="3000" b="1" dirty="0">
+                <a:latin typeface="Corbel" panose="020B0503020204020204" pitchFamily="34" charset="0"/>
               </a:rPr>
-              <a:t>logistic regression</a:t>
-            </a:r>
-            <a:endParaRPr lang="en-GB" sz="2800" dirty="0">
-              <a:latin typeface="+mj-lt"/>
+              <a:t>Logistic regression is a much better fit; it has two extremes that are asymptotic to zero and one</a:t>
+            </a:r>
+            <a:endParaRPr lang="en-GB" sz="3000" b="1" dirty="0">
+              <a:latin typeface="Corbel" panose="020B0503020204020204" pitchFamily="34" charset="0"/>
               <a:ea typeface="Lato" panose="020B0604020202020204" pitchFamily="34" charset="0"/>
               <a:cs typeface="Helvetica" panose="020B0604020202020204" pitchFamily="34" charset="0"/>
             </a:endParaRPr>
@@ -5581,7 +5602,7 @@
         <p:spPr>
           <a:xfrm>
             <a:off x="241301" y="129804"/>
-            <a:ext cx="11747500" cy="523220"/>
+            <a:ext cx="11747500" cy="1015663"/>
           </a:xfrm>
           <a:prstGeom prst="rect">
             <a:avLst/>
@@ -5595,15 +5616,13 @@
           <a:lstStyle/>
           <a:p>
             <a:r>
-              <a:rPr lang="en-US" sz="2800" dirty="0">
-                <a:latin typeface="+mj-lt"/>
-                <a:ea typeface="Lato" panose="020B0604020202020204" pitchFamily="34" charset="0"/>
-                <a:cs typeface="Helvetica" panose="020B0604020202020204" pitchFamily="34" charset="0"/>
+              <a:rPr lang="en-US" sz="3000" b="1" dirty="0">
+                <a:latin typeface="Corbel" panose="020B0503020204020204" pitchFamily="34" charset="0"/>
               </a:rPr>
-              <a:t>logistic regression</a:t>
-            </a:r>
-            <a:endParaRPr lang="en-GB" sz="2800" dirty="0">
-              <a:latin typeface="+mj-lt"/>
+              <a:t>Logistic regression is a much better fit; it has two extremes that are asymptotic to zero and one</a:t>
+            </a:r>
+            <a:endParaRPr lang="en-GB" sz="3000" b="1" dirty="0">
+              <a:latin typeface="Corbel" panose="020B0503020204020204" pitchFamily="34" charset="0"/>
               <a:ea typeface="Lato" panose="020B0604020202020204" pitchFamily="34" charset="0"/>
               <a:cs typeface="Helvetica" panose="020B0604020202020204" pitchFamily="34" charset="0"/>
             </a:endParaRPr>
@@ -5817,7 +5836,7 @@
         <p:spPr>
           <a:xfrm>
             <a:off x="241301" y="129804"/>
-            <a:ext cx="11747500" cy="523220"/>
+            <a:ext cx="11747500" cy="954107"/>
           </a:xfrm>
           <a:prstGeom prst="rect">
             <a:avLst/>
@@ -5831,15 +5850,13 @@
           <a:lstStyle/>
           <a:p>
             <a:r>
-              <a:rPr lang="en-US" sz="2800" dirty="0">
-                <a:latin typeface="+mj-lt"/>
-                <a:ea typeface="Lato" panose="020B0604020202020204" pitchFamily="34" charset="0"/>
-                <a:cs typeface="Helvetica" panose="020B0604020202020204" pitchFamily="34" charset="0"/>
+              <a:rPr lang="en-US" sz="2800" b="1" dirty="0">
+                <a:latin typeface="Corbel" panose="020B0503020204020204" pitchFamily="34" charset="0"/>
               </a:rPr>
-              <a:t>logistic regression</a:t>
-            </a:r>
-            <a:endParaRPr lang="en-GB" sz="2800" dirty="0">
-              <a:latin typeface="+mj-lt"/>
+              <a:t>Logistic regression is a much better fit; it has two extremes that are asymptotic to zero and one</a:t>
+            </a:r>
+            <a:endParaRPr lang="en-GB" sz="2800" b="1" dirty="0">
+              <a:latin typeface="Corbel" panose="020B0503020204020204" pitchFamily="34" charset="0"/>
               <a:ea typeface="Lato" panose="020B0604020202020204" pitchFamily="34" charset="0"/>
               <a:cs typeface="Helvetica" panose="020B0604020202020204" pitchFamily="34" charset="0"/>
             </a:endParaRPr>
@@ -5939,7 +5956,7 @@
         <p:spPr>
           <a:xfrm>
             <a:off x="241301" y="129804"/>
-            <a:ext cx="11747500" cy="523220"/>
+            <a:ext cx="11747500" cy="954107"/>
           </a:xfrm>
           <a:prstGeom prst="rect">
             <a:avLst/>
@@ -5953,15 +5970,13 @@
           <a:lstStyle/>
           <a:p>
             <a:r>
-              <a:rPr lang="en-US" sz="2800" dirty="0">
-                <a:latin typeface="+mj-lt"/>
-                <a:ea typeface="Lato" panose="020B0604020202020204" pitchFamily="34" charset="0"/>
-                <a:cs typeface="Helvetica" panose="020B0604020202020204" pitchFamily="34" charset="0"/>
+              <a:rPr lang="en-US" sz="2800" b="1" dirty="0">
+                <a:latin typeface="Corbel" panose="020B0503020204020204" pitchFamily="34" charset="0"/>
               </a:rPr>
-              <a:t>logistic regression: cost (loss function)</a:t>
-            </a:r>
-            <a:endParaRPr lang="en-GB" sz="2800" dirty="0">
-              <a:latin typeface="+mj-lt"/>
+              <a:t>Logistic regression also uses a different cost function that is better for classification problems</a:t>
+            </a:r>
+            <a:endParaRPr lang="en-GB" sz="2800" b="1" dirty="0">
+              <a:latin typeface="Corbel" panose="020B0503020204020204" pitchFamily="34" charset="0"/>
               <a:ea typeface="Lato" panose="020B0604020202020204" pitchFamily="34" charset="0"/>
               <a:cs typeface="Helvetica" panose="020B0604020202020204" pitchFamily="34" charset="0"/>
             </a:endParaRPr>
@@ -6079,7 +6094,7 @@
         <p:spPr>
           <a:xfrm>
             <a:off x="241301" y="129804"/>
-            <a:ext cx="11747500" cy="523220"/>
+            <a:ext cx="11747500" cy="954107"/>
           </a:xfrm>
           <a:prstGeom prst="rect">
             <a:avLst/>
@@ -6093,15 +6108,13 @@
           <a:lstStyle/>
           <a:p>
             <a:r>
-              <a:rPr lang="en-US" sz="2800" dirty="0">
-                <a:latin typeface="+mj-lt"/>
-                <a:ea typeface="Lato" panose="020B0604020202020204" pitchFamily="34" charset="0"/>
-                <a:cs typeface="Helvetica" panose="020B0604020202020204" pitchFamily="34" charset="0"/>
+              <a:rPr lang="en-US" sz="2800" b="1" dirty="0">
+                <a:latin typeface="Corbel" panose="020B0503020204020204" pitchFamily="34" charset="0"/>
               </a:rPr>
-              <a:t>logistic regression: cost (loss function)</a:t>
-            </a:r>
-            <a:endParaRPr lang="en-GB" sz="2800" dirty="0">
-              <a:latin typeface="+mj-lt"/>
+              <a:t>Logistic regression also uses a different cost function that is better for classification problems</a:t>
+            </a:r>
+            <a:endParaRPr lang="en-GB" sz="2800" b="1" dirty="0">
+              <a:latin typeface="Corbel" panose="020B0503020204020204" pitchFamily="34" charset="0"/>
               <a:ea typeface="Lato" panose="020B0604020202020204" pitchFamily="34" charset="0"/>
               <a:cs typeface="Helvetica" panose="020B0604020202020204" pitchFamily="34" charset="0"/>
             </a:endParaRPr>
@@ -6395,7 +6408,7 @@
         <p:spPr>
           <a:xfrm>
             <a:off x="241301" y="129804"/>
-            <a:ext cx="11747500" cy="523220"/>
+            <a:ext cx="11747500" cy="954107"/>
           </a:xfrm>
           <a:prstGeom prst="rect">
             <a:avLst/>
@@ -6409,15 +6422,13 @@
           <a:lstStyle/>
           <a:p>
             <a:r>
-              <a:rPr lang="en-US" sz="2800" dirty="0">
-                <a:latin typeface="+mj-lt"/>
-                <a:ea typeface="Lato" panose="020B0604020202020204" pitchFamily="34" charset="0"/>
-                <a:cs typeface="Helvetica" panose="020B0604020202020204" pitchFamily="34" charset="0"/>
+              <a:rPr lang="en-US" sz="2800" b="1" dirty="0">
+                <a:latin typeface="Corbel" panose="020B0503020204020204" pitchFamily="34" charset="0"/>
               </a:rPr>
-              <a:t>logistic regression: cost (loss function)</a:t>
-            </a:r>
-            <a:endParaRPr lang="en-GB" sz="2800" dirty="0">
-              <a:latin typeface="+mj-lt"/>
+              <a:t>Logistic regression also uses a different cost function that is better for classification problems</a:t>
+            </a:r>
+            <a:endParaRPr lang="en-GB" sz="2800" b="1" dirty="0">
+              <a:latin typeface="Corbel" panose="020B0503020204020204" pitchFamily="34" charset="0"/>
               <a:ea typeface="Lato" panose="020B0604020202020204" pitchFamily="34" charset="0"/>
               <a:cs typeface="Helvetica" panose="020B0604020202020204" pitchFamily="34" charset="0"/>
             </a:endParaRPr>

--- a/01_Foundations/slides/1_3_logistic_regression.pptx
+++ b/01_Foundations/slides/1_3_logistic_regression.pptx
@@ -5,7 +5,7 @@
     <p:sldMasterId id="2147483648" r:id="rId1"/>
   </p:sldMasterIdLst>
   <p:notesMasterIdLst>
-    <p:notesMasterId r:id="rId15"/>
+    <p:notesMasterId r:id="rId16"/>
   </p:notesMasterIdLst>
   <p:sldIdLst>
     <p:sldId id="264" r:id="rId2"/>
@@ -13,14 +13,15 @@
     <p:sldId id="258" r:id="rId4"/>
     <p:sldId id="259" r:id="rId5"/>
     <p:sldId id="589" r:id="rId6"/>
-    <p:sldId id="590" r:id="rId7"/>
-    <p:sldId id="260" r:id="rId8"/>
-    <p:sldId id="591" r:id="rId9"/>
-    <p:sldId id="592" r:id="rId10"/>
-    <p:sldId id="261" r:id="rId11"/>
-    <p:sldId id="262" r:id="rId12"/>
-    <p:sldId id="501" r:id="rId13"/>
-    <p:sldId id="263" r:id="rId14"/>
+    <p:sldId id="593" r:id="rId7"/>
+    <p:sldId id="590" r:id="rId8"/>
+    <p:sldId id="260" r:id="rId9"/>
+    <p:sldId id="591" r:id="rId10"/>
+    <p:sldId id="592" r:id="rId11"/>
+    <p:sldId id="261" r:id="rId12"/>
+    <p:sldId id="262" r:id="rId13"/>
+    <p:sldId id="501" r:id="rId14"/>
+    <p:sldId id="263" r:id="rId15"/>
   </p:sldIdLst>
   <p:sldSz cx="12192000" cy="6858000"/>
   <p:notesSz cx="6858000" cy="9144000"/>
@@ -434,7 +435,7 @@
           <a:p>
             <a:fld id="{5E9E4307-97E3-48E4-B22B-3E65CE2A671E}" type="datetimeFigureOut">
               <a:rPr lang="en-GB" smtClean="0"/>
-              <a:t>20/10/2026</a:t>
+              <a:t>25/10/2026</a:t>
             </a:fld>
             <a:endParaRPr lang="en-GB"/>
           </a:p>
@@ -981,7 +982,7 @@
           <a:p>
             <a:fld id="{D4839FB7-11DA-4D79-8302-69EB827E14EE}" type="slidenum">
               <a:rPr lang="en-GB" smtClean="0"/>
-              <a:t>10</a:t>
+              <a:t>11</a:t>
             </a:fld>
             <a:endParaRPr lang="en-GB"/>
           </a:p>
@@ -1068,7 +1069,7 @@
           <a:p>
             <a:fld id="{7057AE92-D5D5-4227-B9E7-799476156D5D}" type="slidenum">
               <a:rPr lang="nl-NL" smtClean="0"/>
-              <a:t>13</a:t>
+              <a:t>14</a:t>
             </a:fld>
             <a:endParaRPr lang="nl-NL"/>
           </a:p>
@@ -1218,7 +1219,7 @@
           <a:p>
             <a:fld id="{3D4C3592-CF2E-41CC-9324-DF0416BA06CC}" type="datetimeFigureOut">
               <a:rPr lang="en-GB" smtClean="0"/>
-              <a:t>20/10/2026</a:t>
+              <a:t>25/10/2026</a:t>
             </a:fld>
             <a:endParaRPr lang="en-GB"/>
           </a:p>
@@ -1388,7 +1389,7 @@
           <a:p>
             <a:fld id="{3D4C3592-CF2E-41CC-9324-DF0416BA06CC}" type="datetimeFigureOut">
               <a:rPr lang="en-GB" smtClean="0"/>
-              <a:t>20/10/2026</a:t>
+              <a:t>25/10/2026</a:t>
             </a:fld>
             <a:endParaRPr lang="en-GB"/>
           </a:p>
@@ -1568,7 +1569,7 @@
           <a:p>
             <a:fld id="{3D4C3592-CF2E-41CC-9324-DF0416BA06CC}" type="datetimeFigureOut">
               <a:rPr lang="en-GB" smtClean="0"/>
-              <a:t>20/10/2026</a:t>
+              <a:t>25/10/2026</a:t>
             </a:fld>
             <a:endParaRPr lang="en-GB"/>
           </a:p>
@@ -1738,7 +1739,7 @@
           <a:p>
             <a:fld id="{3D4C3592-CF2E-41CC-9324-DF0416BA06CC}" type="datetimeFigureOut">
               <a:rPr lang="en-GB" smtClean="0"/>
-              <a:t>20/10/2026</a:t>
+              <a:t>25/10/2026</a:t>
             </a:fld>
             <a:endParaRPr lang="en-GB"/>
           </a:p>
@@ -1984,7 +1985,7 @@
           <a:p>
             <a:fld id="{3D4C3592-CF2E-41CC-9324-DF0416BA06CC}" type="datetimeFigureOut">
               <a:rPr lang="en-GB" smtClean="0"/>
-              <a:t>20/10/2026</a:t>
+              <a:t>25/10/2026</a:t>
             </a:fld>
             <a:endParaRPr lang="en-GB"/>
           </a:p>
@@ -2216,7 +2217,7 @@
           <a:p>
             <a:fld id="{3D4C3592-CF2E-41CC-9324-DF0416BA06CC}" type="datetimeFigureOut">
               <a:rPr lang="en-GB" smtClean="0"/>
-              <a:t>20/10/2026</a:t>
+              <a:t>25/10/2026</a:t>
             </a:fld>
             <a:endParaRPr lang="en-GB"/>
           </a:p>
@@ -2583,7 +2584,7 @@
           <a:p>
             <a:fld id="{3D4C3592-CF2E-41CC-9324-DF0416BA06CC}" type="datetimeFigureOut">
               <a:rPr lang="en-GB" smtClean="0"/>
-              <a:t>20/10/2026</a:t>
+              <a:t>25/10/2026</a:t>
             </a:fld>
             <a:endParaRPr lang="en-GB"/>
           </a:p>
@@ -2701,7 +2702,7 @@
           <a:p>
             <a:fld id="{3D4C3592-CF2E-41CC-9324-DF0416BA06CC}" type="datetimeFigureOut">
               <a:rPr lang="en-GB" smtClean="0"/>
-              <a:t>20/10/2026</a:t>
+              <a:t>25/10/2026</a:t>
             </a:fld>
             <a:endParaRPr lang="en-GB"/>
           </a:p>
@@ -2796,7 +2797,7 @@
           <a:p>
             <a:fld id="{3D4C3592-CF2E-41CC-9324-DF0416BA06CC}" type="datetimeFigureOut">
               <a:rPr lang="en-GB" smtClean="0"/>
-              <a:t>20/10/2026</a:t>
+              <a:t>25/10/2026</a:t>
             </a:fld>
             <a:endParaRPr lang="en-GB"/>
           </a:p>
@@ -3073,7 +3074,7 @@
           <a:p>
             <a:fld id="{3D4C3592-CF2E-41CC-9324-DF0416BA06CC}" type="datetimeFigureOut">
               <a:rPr lang="en-GB" smtClean="0"/>
-              <a:t>20/10/2026</a:t>
+              <a:t>25/10/2026</a:t>
             </a:fld>
             <a:endParaRPr lang="en-GB"/>
           </a:p>
@@ -3326,7 +3327,7 @@
           <a:p>
             <a:fld id="{3D4C3592-CF2E-41CC-9324-DF0416BA06CC}" type="datetimeFigureOut">
               <a:rPr lang="en-GB" smtClean="0"/>
-              <a:t>20/10/2026</a:t>
+              <a:t>25/10/2026</a:t>
             </a:fld>
             <a:endParaRPr lang="en-GB"/>
           </a:p>
@@ -3539,7 +3540,7 @@
           <a:p>
             <a:fld id="{3D4C3592-CF2E-41CC-9324-DF0416BA06CC}" type="datetimeFigureOut">
               <a:rPr lang="en-GB" smtClean="0"/>
-              <a:t>20/10/2026</a:t>
+              <a:t>25/10/2026</a:t>
             </a:fld>
             <a:endParaRPr lang="en-GB"/>
           </a:p>
@@ -4057,6 +4058,144 @@
   <p:cSld>
     <p:spTree>
       <p:nvGrpSpPr>
+        <p:cNvPr id="1" name="">
+          <a:extLst>
+            <a:ext uri="{FF2B5EF4-FFF2-40B4-BE49-F238E27FC236}">
+              <a16:creationId xmlns:a16="http://schemas.microsoft.com/office/drawing/2014/main" id="{1B6F20FD-5007-64BF-832A-9AACD28AAC7A}"/>
+            </a:ext>
+          </a:extLst>
+        </p:cNvPr>
+        <p:cNvGrpSpPr/>
+        <p:nvPr/>
+      </p:nvGrpSpPr>
+      <p:grpSpPr>
+        <a:xfrm>
+          <a:off x="0" y="0"/>
+          <a:ext cx="0" cy="0"/>
+          <a:chOff x="0" y="0"/>
+          <a:chExt cx="0" cy="0"/>
+        </a:xfrm>
+      </p:grpSpPr>
+      <p:pic>
+        <p:nvPicPr>
+          <p:cNvPr id="5" name="Picture 4">
+            <a:extLst>
+              <a:ext uri="{FF2B5EF4-FFF2-40B4-BE49-F238E27FC236}">
+                <a16:creationId xmlns:a16="http://schemas.microsoft.com/office/drawing/2014/main" id="{5F1A1D49-B534-AEA6-FBC2-E741FE1929A5}"/>
+              </a:ext>
+            </a:extLst>
+          </p:cNvPr>
+          <p:cNvPicPr>
+            <a:picLocks noChangeAspect="1"/>
+          </p:cNvPicPr>
+          <p:nvPr/>
+        </p:nvPicPr>
+        <p:blipFill>
+          <a:blip r:embed="rId2"/>
+          <a:stretch>
+            <a:fillRect/>
+          </a:stretch>
+        </p:blipFill>
+        <p:spPr>
+          <a:xfrm>
+            <a:off x="886946" y="3327306"/>
+            <a:ext cx="10991850" cy="2390775"/>
+          </a:xfrm>
+          <a:prstGeom prst="rect">
+            <a:avLst/>
+          </a:prstGeom>
+        </p:spPr>
+      </p:pic>
+      <p:pic>
+        <p:nvPicPr>
+          <p:cNvPr id="2" name="Picture 1">
+            <a:extLst>
+              <a:ext uri="{FF2B5EF4-FFF2-40B4-BE49-F238E27FC236}">
+                <a16:creationId xmlns:a16="http://schemas.microsoft.com/office/drawing/2014/main" id="{CC348E41-9C49-E3D5-2927-56454C4FBD57}"/>
+              </a:ext>
+            </a:extLst>
+          </p:cNvPr>
+          <p:cNvPicPr>
+            <a:picLocks noChangeAspect="1"/>
+          </p:cNvPicPr>
+          <p:nvPr/>
+        </p:nvPicPr>
+        <p:blipFill>
+          <a:blip r:embed="rId3"/>
+          <a:stretch>
+            <a:fillRect/>
+          </a:stretch>
+        </p:blipFill>
+        <p:spPr>
+          <a:xfrm>
+            <a:off x="2009481" y="1681089"/>
+            <a:ext cx="8454392" cy="1062110"/>
+          </a:xfrm>
+          <a:prstGeom prst="rect">
+            <a:avLst/>
+          </a:prstGeom>
+        </p:spPr>
+      </p:pic>
+      <p:sp>
+        <p:nvSpPr>
+          <p:cNvPr id="4" name="TextBox 3">
+            <a:extLst>
+              <a:ext uri="{FF2B5EF4-FFF2-40B4-BE49-F238E27FC236}">
+                <a16:creationId xmlns:a16="http://schemas.microsoft.com/office/drawing/2014/main" id="{10808BA1-4BBB-3B38-4584-91EE285247EC}"/>
+              </a:ext>
+            </a:extLst>
+          </p:cNvPr>
+          <p:cNvSpPr txBox="1"/>
+          <p:nvPr/>
+        </p:nvSpPr>
+        <p:spPr>
+          <a:xfrm>
+            <a:off x="241301" y="129804"/>
+            <a:ext cx="11747500" cy="954107"/>
+          </a:xfrm>
+          <a:prstGeom prst="rect">
+            <a:avLst/>
+          </a:prstGeom>
+          <a:noFill/>
+        </p:spPr>
+        <p:txBody>
+          <a:bodyPr wrap="square" rtlCol="0">
+            <a:spAutoFit/>
+          </a:bodyPr>
+          <a:lstStyle/>
+          <a:p>
+            <a:r>
+              <a:rPr lang="en-US" sz="2800" b="1" dirty="0">
+                <a:latin typeface="Corbel" panose="020B0503020204020204" pitchFamily="34" charset="0"/>
+              </a:rPr>
+              <a:t>Logistic regression also uses a different cost function that is better for classification problems</a:t>
+            </a:r>
+            <a:endParaRPr lang="en-GB" sz="2800" b="1" dirty="0">
+              <a:latin typeface="Corbel" panose="020B0503020204020204" pitchFamily="34" charset="0"/>
+              <a:ea typeface="Lato" panose="020B0604020202020204" pitchFamily="34" charset="0"/>
+              <a:cs typeface="Helvetica" panose="020B0604020202020204" pitchFamily="34" charset="0"/>
+            </a:endParaRPr>
+          </a:p>
+        </p:txBody>
+      </p:sp>
+    </p:spTree>
+    <p:extLst>
+      <p:ext uri="{BB962C8B-B14F-4D97-AF65-F5344CB8AC3E}">
+        <p14:creationId xmlns:p14="http://schemas.microsoft.com/office/powerpoint/2010/main" val="2720685458"/>
+      </p:ext>
+    </p:extLst>
+  </p:cSld>
+  <p:clrMapOvr>
+    <a:masterClrMapping/>
+  </p:clrMapOvr>
+</p:sld>
+</file>
+
+<file path=ppt/slides/slide11.xml><?xml version="1.0" encoding="utf-8"?>
+<p:sld xmlns:a="http://schemas.openxmlformats.org/drawingml/2006/main" xmlns:r="http://schemas.openxmlformats.org/officeDocument/2006/relationships" xmlns:p="http://schemas.openxmlformats.org/presentationml/2006/main">
+  <p:cSld>
+    <p:spTree>
+      <p:nvGrpSpPr>
         <p:cNvPr id="1" name=""/>
         <p:cNvGrpSpPr/>
         <p:nvPr/>
@@ -4190,7 +4329,7 @@
 </p:sld>
 </file>
 
-<file path=ppt/slides/slide11.xml><?xml version="1.0" encoding="utf-8"?>
+<file path=ppt/slides/slide12.xml><?xml version="1.0" encoding="utf-8"?>
 <p:sld xmlns:a="http://schemas.openxmlformats.org/drawingml/2006/main" xmlns:r="http://schemas.openxmlformats.org/officeDocument/2006/relationships" xmlns:p="http://schemas.openxmlformats.org/presentationml/2006/main">
   <p:cSld>
     <p:spTree>
@@ -4322,7 +4461,7 @@
 </p:sld>
 </file>
 
-<file path=ppt/slides/slide12.xml><?xml version="1.0" encoding="utf-8"?>
+<file path=ppt/slides/slide13.xml><?xml version="1.0" encoding="utf-8"?>
 <p:sld xmlns:a="http://schemas.openxmlformats.org/drawingml/2006/main" xmlns:r="http://schemas.openxmlformats.org/officeDocument/2006/relationships" xmlns:p="http://schemas.openxmlformats.org/presentationml/2006/main">
   <p:cSld>
     <p:spTree>
@@ -4424,7 +4563,7 @@
 </p:sld>
 </file>
 
-<file path=ppt/slides/slide13.xml><?xml version="1.0" encoding="utf-8"?>
+<file path=ppt/slides/slide14.xml><?xml version="1.0" encoding="utf-8"?>
 <p:sld xmlns:a="http://schemas.openxmlformats.org/drawingml/2006/main" xmlns:r="http://schemas.openxmlformats.org/officeDocument/2006/relationships" xmlns:p="http://schemas.openxmlformats.org/presentationml/2006/main">
   <p:cSld>
     <p:spTree>
@@ -5631,10 +5770,10 @@
       </p:sp>
       <p:pic>
         <p:nvPicPr>
-          <p:cNvPr id="8" name="Picture 7">
+          <p:cNvPr id="9" name="Picture 8">
             <a:extLst>
               <a:ext uri="{FF2B5EF4-FFF2-40B4-BE49-F238E27FC236}">
-                <a16:creationId xmlns:a16="http://schemas.microsoft.com/office/drawing/2014/main" id="{043D0B59-62F9-2A08-E50B-0743196E89D3}"/>
+                <a16:creationId xmlns:a16="http://schemas.microsoft.com/office/drawing/2014/main" id="{A8C03AB8-D8B0-0FB8-2F61-564383B645E4}"/>
               </a:ext>
             </a:extLst>
           </p:cNvPr>
@@ -5644,21 +5783,15 @@
           <p:nvPr/>
         </p:nvPicPr>
         <p:blipFill>
-          <a:blip r:embed="rId4">
-            <a:extLst>
-              <a:ext uri="{28A0092B-C50C-407E-A947-70E740481C1C}">
-                <a14:useLocalDpi xmlns:a14="http://schemas.microsoft.com/office/drawing/2010/main" val="0"/>
-              </a:ext>
-            </a:extLst>
-          </a:blip>
+          <a:blip r:embed="rId4"/>
           <a:stretch>
             <a:fillRect/>
           </a:stretch>
         </p:blipFill>
         <p:spPr>
           <a:xfrm>
-            <a:off x="916159" y="1669598"/>
-            <a:ext cx="5065786" cy="4160528"/>
+            <a:off x="1027778" y="1754135"/>
+            <a:ext cx="5273497" cy="4534293"/>
           </a:xfrm>
           <a:prstGeom prst="rect">
             <a:avLst/>
@@ -5679,6 +5812,174 @@
 </file>
 
 <file path=ppt/slides/slide6.xml><?xml version="1.0" encoding="utf-8"?>
+<p:sld xmlns:a="http://schemas.openxmlformats.org/drawingml/2006/main" xmlns:r="http://schemas.openxmlformats.org/officeDocument/2006/relationships" xmlns:p="http://schemas.openxmlformats.org/presentationml/2006/main">
+  <p:cSld>
+    <p:spTree>
+      <p:nvGrpSpPr>
+        <p:cNvPr id="1" name="">
+          <a:extLst>
+            <a:ext uri="{FF2B5EF4-FFF2-40B4-BE49-F238E27FC236}">
+              <a16:creationId xmlns:a16="http://schemas.microsoft.com/office/drawing/2014/main" id="{69F71860-FD85-6EDB-5122-3F0C8753CEED}"/>
+            </a:ext>
+          </a:extLst>
+        </p:cNvPr>
+        <p:cNvGrpSpPr/>
+        <p:nvPr/>
+      </p:nvGrpSpPr>
+      <p:grpSpPr>
+        <a:xfrm>
+          <a:off x="0" y="0"/>
+          <a:ext cx="0" cy="0"/>
+          <a:chOff x="0" y="0"/>
+          <a:chExt cx="0" cy="0"/>
+        </a:xfrm>
+      </p:grpSpPr>
+      <p:pic>
+        <p:nvPicPr>
+          <p:cNvPr id="4" name="Picture 3">
+            <a:extLst>
+              <a:ext uri="{FF2B5EF4-FFF2-40B4-BE49-F238E27FC236}">
+                <a16:creationId xmlns:a16="http://schemas.microsoft.com/office/drawing/2014/main" id="{43FC8016-2C98-5886-8246-D1E35F6EEDB4}"/>
+              </a:ext>
+            </a:extLst>
+          </p:cNvPr>
+          <p:cNvPicPr>
+            <a:picLocks noChangeAspect="1"/>
+          </p:cNvPicPr>
+          <p:nvPr/>
+        </p:nvPicPr>
+        <p:blipFill>
+          <a:blip r:embed="rId2"/>
+          <a:stretch>
+            <a:fillRect/>
+          </a:stretch>
+        </p:blipFill>
+        <p:spPr>
+          <a:xfrm>
+            <a:off x="6622114" y="2602286"/>
+            <a:ext cx="3286125" cy="828675"/>
+          </a:xfrm>
+          <a:prstGeom prst="rect">
+            <a:avLst/>
+          </a:prstGeom>
+        </p:spPr>
+      </p:pic>
+      <p:pic>
+        <p:nvPicPr>
+          <p:cNvPr id="5" name="Picture 4">
+            <a:extLst>
+              <a:ext uri="{FF2B5EF4-FFF2-40B4-BE49-F238E27FC236}">
+                <a16:creationId xmlns:a16="http://schemas.microsoft.com/office/drawing/2014/main" id="{61A1B4A0-51C0-B0D7-EBF9-46DFA6CF8E71}"/>
+              </a:ext>
+            </a:extLst>
+          </p:cNvPr>
+          <p:cNvPicPr>
+            <a:picLocks noChangeAspect="1"/>
+          </p:cNvPicPr>
+          <p:nvPr/>
+        </p:nvPicPr>
+        <p:blipFill>
+          <a:blip r:embed="rId3"/>
+          <a:stretch>
+            <a:fillRect/>
+          </a:stretch>
+        </p:blipFill>
+        <p:spPr>
+          <a:xfrm>
+            <a:off x="6622114" y="3749862"/>
+            <a:ext cx="2200275" cy="876300"/>
+          </a:xfrm>
+          <a:prstGeom prst="rect">
+            <a:avLst/>
+          </a:prstGeom>
+        </p:spPr>
+      </p:pic>
+      <p:sp>
+        <p:nvSpPr>
+          <p:cNvPr id="6" name="TextBox 5">
+            <a:extLst>
+              <a:ext uri="{FF2B5EF4-FFF2-40B4-BE49-F238E27FC236}">
+                <a16:creationId xmlns:a16="http://schemas.microsoft.com/office/drawing/2014/main" id="{3356D841-5A7C-3024-2098-C796CA82C9FF}"/>
+              </a:ext>
+            </a:extLst>
+          </p:cNvPr>
+          <p:cNvSpPr txBox="1"/>
+          <p:nvPr/>
+        </p:nvSpPr>
+        <p:spPr>
+          <a:xfrm>
+            <a:off x="241301" y="129804"/>
+            <a:ext cx="11747500" cy="1015663"/>
+          </a:xfrm>
+          <a:prstGeom prst="rect">
+            <a:avLst/>
+          </a:prstGeom>
+          <a:noFill/>
+        </p:spPr>
+        <p:txBody>
+          <a:bodyPr wrap="square" rtlCol="0">
+            <a:spAutoFit/>
+          </a:bodyPr>
+          <a:lstStyle/>
+          <a:p>
+            <a:r>
+              <a:rPr lang="en-US" sz="3000" b="1" dirty="0">
+                <a:latin typeface="Corbel" panose="020B0503020204020204" pitchFamily="34" charset="0"/>
+              </a:rPr>
+              <a:t>Logistic regression is a much better fit; it has two extremes that are asymptotic to zero and one</a:t>
+            </a:r>
+            <a:endParaRPr lang="en-GB" sz="3000" b="1" dirty="0">
+              <a:latin typeface="Corbel" panose="020B0503020204020204" pitchFamily="34" charset="0"/>
+              <a:ea typeface="Lato" panose="020B0604020202020204" pitchFamily="34" charset="0"/>
+              <a:cs typeface="Helvetica" panose="020B0604020202020204" pitchFamily="34" charset="0"/>
+            </a:endParaRPr>
+          </a:p>
+        </p:txBody>
+      </p:sp>
+      <p:pic>
+        <p:nvPicPr>
+          <p:cNvPr id="3" name="Picture 2">
+            <a:extLst>
+              <a:ext uri="{FF2B5EF4-FFF2-40B4-BE49-F238E27FC236}">
+                <a16:creationId xmlns:a16="http://schemas.microsoft.com/office/drawing/2014/main" id="{5FB8ED06-C6D3-00A0-07D8-01E54C13DE60}"/>
+              </a:ext>
+            </a:extLst>
+          </p:cNvPr>
+          <p:cNvPicPr>
+            <a:picLocks noChangeAspect="1"/>
+          </p:cNvPicPr>
+          <p:nvPr/>
+        </p:nvPicPr>
+        <p:blipFill>
+          <a:blip r:embed="rId4"/>
+          <a:stretch>
+            <a:fillRect/>
+          </a:stretch>
+        </p:blipFill>
+        <p:spPr>
+          <a:xfrm>
+            <a:off x="875375" y="1417940"/>
+            <a:ext cx="5349704" cy="4663844"/>
+          </a:xfrm>
+          <a:prstGeom prst="rect">
+            <a:avLst/>
+          </a:prstGeom>
+        </p:spPr>
+      </p:pic>
+    </p:spTree>
+    <p:extLst>
+      <p:ext uri="{BB962C8B-B14F-4D97-AF65-F5344CB8AC3E}">
+        <p14:creationId xmlns:p14="http://schemas.microsoft.com/office/powerpoint/2010/main" val="1074086670"/>
+      </p:ext>
+    </p:extLst>
+  </p:cSld>
+  <p:clrMapOvr>
+    <a:masterClrMapping/>
+  </p:clrMapOvr>
+</p:sld>
+</file>
+
+<file path=ppt/slides/slide7.xml><?xml version="1.0" encoding="utf-8"?>
 <p:sld xmlns:a="http://schemas.openxmlformats.org/drawingml/2006/main" xmlns:r="http://schemas.openxmlformats.org/officeDocument/2006/relationships" xmlns:p="http://schemas.openxmlformats.org/presentationml/2006/main">
   <p:cSld>
     <p:spTree>
@@ -5876,7 +6177,7 @@
 </p:sld>
 </file>
 
-<file path=ppt/slides/slide7.xml><?xml version="1.0" encoding="utf-8"?>
+<file path=ppt/slides/slide8.xml><?xml version="1.0" encoding="utf-8"?>
 <p:sld xmlns:a="http://schemas.openxmlformats.org/drawingml/2006/main" xmlns:r="http://schemas.openxmlformats.org/officeDocument/2006/relationships" xmlns:p="http://schemas.openxmlformats.org/presentationml/2006/main">
   <p:cSld>
     <p:spTree>
@@ -5996,7 +6297,7 @@
 </p:sld>
 </file>
 
-<file path=ppt/slides/slide8.xml><?xml version="1.0" encoding="utf-8"?>
+<file path=ppt/slides/slide9.xml><?xml version="1.0" encoding="utf-8"?>
 <p:sld xmlns:a="http://schemas.openxmlformats.org/drawingml/2006/main" xmlns:r="http://schemas.openxmlformats.org/officeDocument/2006/relationships" xmlns:p="http://schemas.openxmlformats.org/presentationml/2006/main">
   <p:cSld>
     <p:spTree>
@@ -6301,144 +6602,6 @@
     <p:extLst>
       <p:ext uri="{BB962C8B-B14F-4D97-AF65-F5344CB8AC3E}">
         <p14:creationId xmlns:p14="http://schemas.microsoft.com/office/powerpoint/2010/main" val="20081744"/>
-      </p:ext>
-    </p:extLst>
-  </p:cSld>
-  <p:clrMapOvr>
-    <a:masterClrMapping/>
-  </p:clrMapOvr>
-</p:sld>
-</file>
-
-<file path=ppt/slides/slide9.xml><?xml version="1.0" encoding="utf-8"?>
-<p:sld xmlns:a="http://schemas.openxmlformats.org/drawingml/2006/main" xmlns:r="http://schemas.openxmlformats.org/officeDocument/2006/relationships" xmlns:p="http://schemas.openxmlformats.org/presentationml/2006/main">
-  <p:cSld>
-    <p:spTree>
-      <p:nvGrpSpPr>
-        <p:cNvPr id="1" name="">
-          <a:extLst>
-            <a:ext uri="{FF2B5EF4-FFF2-40B4-BE49-F238E27FC236}">
-              <a16:creationId xmlns:a16="http://schemas.microsoft.com/office/drawing/2014/main" id="{1B6F20FD-5007-64BF-832A-9AACD28AAC7A}"/>
-            </a:ext>
-          </a:extLst>
-        </p:cNvPr>
-        <p:cNvGrpSpPr/>
-        <p:nvPr/>
-      </p:nvGrpSpPr>
-      <p:grpSpPr>
-        <a:xfrm>
-          <a:off x="0" y="0"/>
-          <a:ext cx="0" cy="0"/>
-          <a:chOff x="0" y="0"/>
-          <a:chExt cx="0" cy="0"/>
-        </a:xfrm>
-      </p:grpSpPr>
-      <p:pic>
-        <p:nvPicPr>
-          <p:cNvPr id="5" name="Picture 4">
-            <a:extLst>
-              <a:ext uri="{FF2B5EF4-FFF2-40B4-BE49-F238E27FC236}">
-                <a16:creationId xmlns:a16="http://schemas.microsoft.com/office/drawing/2014/main" id="{5F1A1D49-B534-AEA6-FBC2-E741FE1929A5}"/>
-              </a:ext>
-            </a:extLst>
-          </p:cNvPr>
-          <p:cNvPicPr>
-            <a:picLocks noChangeAspect="1"/>
-          </p:cNvPicPr>
-          <p:nvPr/>
-        </p:nvPicPr>
-        <p:blipFill>
-          <a:blip r:embed="rId2"/>
-          <a:stretch>
-            <a:fillRect/>
-          </a:stretch>
-        </p:blipFill>
-        <p:spPr>
-          <a:xfrm>
-            <a:off x="886946" y="3327306"/>
-            <a:ext cx="10991850" cy="2390775"/>
-          </a:xfrm>
-          <a:prstGeom prst="rect">
-            <a:avLst/>
-          </a:prstGeom>
-        </p:spPr>
-      </p:pic>
-      <p:pic>
-        <p:nvPicPr>
-          <p:cNvPr id="2" name="Picture 1">
-            <a:extLst>
-              <a:ext uri="{FF2B5EF4-FFF2-40B4-BE49-F238E27FC236}">
-                <a16:creationId xmlns:a16="http://schemas.microsoft.com/office/drawing/2014/main" id="{CC348E41-9C49-E3D5-2927-56454C4FBD57}"/>
-              </a:ext>
-            </a:extLst>
-          </p:cNvPr>
-          <p:cNvPicPr>
-            <a:picLocks noChangeAspect="1"/>
-          </p:cNvPicPr>
-          <p:nvPr/>
-        </p:nvPicPr>
-        <p:blipFill>
-          <a:blip r:embed="rId3"/>
-          <a:stretch>
-            <a:fillRect/>
-          </a:stretch>
-        </p:blipFill>
-        <p:spPr>
-          <a:xfrm>
-            <a:off x="2009481" y="1681089"/>
-            <a:ext cx="8454392" cy="1062110"/>
-          </a:xfrm>
-          <a:prstGeom prst="rect">
-            <a:avLst/>
-          </a:prstGeom>
-        </p:spPr>
-      </p:pic>
-      <p:sp>
-        <p:nvSpPr>
-          <p:cNvPr id="4" name="TextBox 3">
-            <a:extLst>
-              <a:ext uri="{FF2B5EF4-FFF2-40B4-BE49-F238E27FC236}">
-                <a16:creationId xmlns:a16="http://schemas.microsoft.com/office/drawing/2014/main" id="{10808BA1-4BBB-3B38-4584-91EE285247EC}"/>
-              </a:ext>
-            </a:extLst>
-          </p:cNvPr>
-          <p:cNvSpPr txBox="1"/>
-          <p:nvPr/>
-        </p:nvSpPr>
-        <p:spPr>
-          <a:xfrm>
-            <a:off x="241301" y="129804"/>
-            <a:ext cx="11747500" cy="954107"/>
-          </a:xfrm>
-          <a:prstGeom prst="rect">
-            <a:avLst/>
-          </a:prstGeom>
-          <a:noFill/>
-        </p:spPr>
-        <p:txBody>
-          <a:bodyPr wrap="square" rtlCol="0">
-            <a:spAutoFit/>
-          </a:bodyPr>
-          <a:lstStyle/>
-          <a:p>
-            <a:r>
-              <a:rPr lang="en-US" sz="2800" b="1" dirty="0">
-                <a:latin typeface="Corbel" panose="020B0503020204020204" pitchFamily="34" charset="0"/>
-              </a:rPr>
-              <a:t>Logistic regression also uses a different cost function that is better for classification problems</a:t>
-            </a:r>
-            <a:endParaRPr lang="en-GB" sz="2800" b="1" dirty="0">
-              <a:latin typeface="Corbel" panose="020B0503020204020204" pitchFamily="34" charset="0"/>
-              <a:ea typeface="Lato" panose="020B0604020202020204" pitchFamily="34" charset="0"/>
-              <a:cs typeface="Helvetica" panose="020B0604020202020204" pitchFamily="34" charset="0"/>
-            </a:endParaRPr>
-          </a:p>
-        </p:txBody>
-      </p:sp>
-    </p:spTree>
-    <p:extLst>
-      <p:ext uri="{BB962C8B-B14F-4D97-AF65-F5344CB8AC3E}">
-        <p14:creationId xmlns:p14="http://schemas.microsoft.com/office/powerpoint/2010/main" val="2720685458"/>
       </p:ext>
     </p:extLst>
   </p:cSld>
